--- a/assets/TCS349/Unit-2/Lecture7_Privacy_in_AI.pptx
+++ b/assets/TCS349/Unit-2/Lecture7_Privacy_in_AI.pptx
@@ -4,6 +4,9 @@
   <p:sldMasterIdLst>
     <p:sldMasterId id="2147483648" r:id="rId1"/>
   </p:sldMasterIdLst>
+  <p:notesMasterIdLst>
+    <p:notesMasterId r:id="rId13"/>
+  </p:notesMasterIdLst>
   <p:sldIdLst>
     <p:sldId id="256" r:id="rId2"/>
     <p:sldId id="257" r:id="rId3"/>
@@ -17,9 +20,6 @@
     <p:sldId id="265" r:id="rId11"/>
     <p:sldId id="266" r:id="rId12"/>
   </p:sldIdLst>
-  <p:notesMasterIdLst>
-    <p:notesMasterId r:id="rId13"/>
-  </p:notesMasterIdLst>
   <p:sldSz cx="12192000" cy="6858000"/>
   <p:notesSz cx="6858000" cy="12192000"/>
   <p:defaultTextStyle>
@@ -114,6 +114,11 @@
       </a:defRPr>
     </a:lvl9pPr>
   </p:defaultTextStyle>
+  <p:extLst>
+    <p:ext uri="{EFAFB233-063F-42B5-8137-9DF3F51BA10A}">
+      <p15:sldGuideLst xmlns:p15="http://schemas.microsoft.com/office/powerpoint/2012/main"/>
+    </p:ext>
+  </p:extLst>
 </p:presentation>
 </file>
 
@@ -139,234 +144,10 @@
           <a:chExt cx="0" cy="0"/>
         </a:xfrm>
       </p:grpSpPr>
-      <p:sp>
-        <p:nvSpPr>
-          <p:cNvPr id="2" name="Header Placeholder 1"/>
-          <p:cNvSpPr>
-            <a:spLocks noGrp="1"/>
-          </p:cNvSpPr>
-          <p:nvPr>
-            <p:ph type="hdr" sz="quarter"/>
-          </p:nvPr>
-        </p:nvSpPr>
-        <p:spPr>
-          <a:xfrm>
-            <a:off x="0" y="0"/>
-            <a:ext cx="2971800" cy="458788"/>
-          </a:xfrm>
-          <a:prstGeom prst="rect">
-            <a:avLst/>
-          </a:prstGeom>
-        </p:spPr>
-        <p:txBody>
-          <a:bodyPr vert="horz" lIns="91440" tIns="45720" rIns="91440" bIns="45720" rtlCol="0"/>
-          <a:lstStyle>
-            <a:lvl1pPr algn="l">
-              <a:defRPr sz="1200"/>
-            </a:lvl1pPr>
-          </a:lstStyle>
-          <a:p>
-            <a:endParaRPr lang="en-US"/>
-          </a:p>
-        </p:txBody>
-      </p:sp>
-      <p:sp>
-        <p:nvSpPr>
-          <p:cNvPr id="3" name="Date Placeholder 2"/>
-          <p:cNvSpPr>
-            <a:spLocks noGrp="1"/>
-          </p:cNvSpPr>
-          <p:nvPr>
-            <p:ph type="dt" idx="1"/>
-          </p:nvPr>
-        </p:nvSpPr>
-        <p:spPr>
-          <a:xfrm>
-            <a:off x="3884613" y="0"/>
-            <a:ext cx="2971800" cy="458788"/>
-          </a:xfrm>
-          <a:prstGeom prst="rect">
-            <a:avLst/>
-          </a:prstGeom>
-        </p:spPr>
-        <p:txBody>
-          <a:bodyPr vert="horz" lIns="91440" tIns="45720" rIns="91440" bIns="45720" rtlCol="0"/>
-          <a:lstStyle>
-            <a:lvl1pPr algn="r">
-              <a:defRPr sz="1200"/>
-            </a:lvl1pPr>
-          </a:lstStyle>
-          <a:p>
-            <a:fld id="{5282F153-3F37-0F45-9E97-73ACFA13230C}" type="datetimeFigureOut">
-              <a:rPr lang="en-US"/>
-              <a:t>7/23/19</a:t>
-            </a:fld>
-            <a:endParaRPr lang="en-US"/>
-          </a:p>
-        </p:txBody>
-      </p:sp>
-      <p:sp>
-        <p:nvSpPr>
-          <p:cNvPr id="4" name="Slide Image Placeholder 3"/>
-          <p:cNvSpPr>
-            <a:spLocks noGrp="1" noRot="1" noChangeAspect="1"/>
-          </p:cNvSpPr>
-          <p:nvPr>
-            <p:ph type="sldImg" idx="2"/>
-          </p:nvPr>
-        </p:nvSpPr>
-        <p:spPr>
-          <a:xfrm>
-            <a:off x="685800" y="1143000"/>
-            <a:ext cx="5486400" cy="3086100"/>
-          </a:xfrm>
-          <a:prstGeom prst="rect">
-            <a:avLst/>
-          </a:prstGeom>
-          <a:noFill/>
-          <a:ln w="12700">
-            <a:solidFill>
-              <a:prstClr val="black"/>
-            </a:solidFill>
-          </a:ln>
-        </p:spPr>
-        <p:txBody>
-          <a:bodyPr vert="horz" lIns="91440" tIns="45720" rIns="91440" bIns="45720" rtlCol="0" anchor="ctr"/>
-          <a:lstStyle/>
-          <a:p>
-            <a:endParaRPr lang="en-US"/>
-          </a:p>
-        </p:txBody>
-      </p:sp>
-      <p:sp>
-        <p:nvSpPr>
-          <p:cNvPr id="5" name="Notes Placeholder 4"/>
-          <p:cNvSpPr>
-            <a:spLocks noGrp="1"/>
-          </p:cNvSpPr>
-          <p:nvPr>
-            <p:ph type="body" sz="quarter" idx="3"/>
-          </p:nvPr>
-        </p:nvSpPr>
-        <p:spPr>
-          <a:xfrm>
-            <a:off x="685800" y="4400550"/>
-            <a:ext cx="5486400" cy="3600450"/>
-          </a:xfrm>
-          <a:prstGeom prst="rect">
-            <a:avLst/>
-          </a:prstGeom>
-        </p:spPr>
-        <p:txBody>
-          <a:bodyPr vert="horz" lIns="91440" tIns="45720" rIns="91440" bIns="45720" rtlCol="0"/>
-          <a:lstStyle/>
-          <a:p>
-            <a:pPr lvl="0"/>
-            <a:r>
-              <a:rPr lang="en-US"/>
-              <a:t>Click to edit Master text styles</a:t>
-            </a:r>
-          </a:p>
-          <a:p>
-            <a:pPr lvl="1"/>
-            <a:r>
-              <a:rPr lang="en-US"/>
-              <a:t>Second level</a:t>
-            </a:r>
-          </a:p>
-          <a:p>
-            <a:pPr lvl="2"/>
-            <a:r>
-              <a:rPr lang="en-US"/>
-              <a:t>Third level</a:t>
-            </a:r>
-          </a:p>
-          <a:p>
-            <a:pPr lvl="3"/>
-            <a:r>
-              <a:rPr lang="en-US"/>
-              <a:t>Fourth level</a:t>
-            </a:r>
-          </a:p>
-          <a:p>
-            <a:pPr lvl="4"/>
-            <a:r>
-              <a:rPr lang="en-US"/>
-              <a:t>Fifth level</a:t>
-            </a:r>
-          </a:p>
-        </p:txBody>
-      </p:sp>
-      <p:sp>
-        <p:nvSpPr>
-          <p:cNvPr id="6" name="Footer Placeholder 5"/>
-          <p:cNvSpPr>
-            <a:spLocks noGrp="1"/>
-          </p:cNvSpPr>
-          <p:nvPr>
-            <p:ph type="ftr" sz="quarter" idx="4"/>
-          </p:nvPr>
-        </p:nvSpPr>
-        <p:spPr>
-          <a:xfrm>
-            <a:off x="0" y="8685213"/>
-            <a:ext cx="2971800" cy="458787"/>
-          </a:xfrm>
-          <a:prstGeom prst="rect">
-            <a:avLst/>
-          </a:prstGeom>
-        </p:spPr>
-        <p:txBody>
-          <a:bodyPr vert="horz" lIns="91440" tIns="45720" rIns="91440" bIns="45720" rtlCol="0" anchor="b"/>
-          <a:lstStyle>
-            <a:lvl1pPr algn="l">
-              <a:defRPr sz="1200"/>
-            </a:lvl1pPr>
-          </a:lstStyle>
-          <a:p>
-            <a:endParaRPr lang="en-US"/>
-          </a:p>
-        </p:txBody>
-      </p:sp>
-      <p:sp>
-        <p:nvSpPr>
-          <p:cNvPr id="7" name="Slide Number Placeholder 6"/>
-          <p:cNvSpPr>
-            <a:spLocks noGrp="1"/>
-          </p:cNvSpPr>
-          <p:nvPr>
-            <p:ph type="sldNum" sz="quarter" idx="5"/>
-          </p:nvPr>
-        </p:nvSpPr>
-        <p:spPr>
-          <a:xfrm>
-            <a:off x="3884613" y="8685213"/>
-            <a:ext cx="2971800" cy="458787"/>
-          </a:xfrm>
-          <a:prstGeom prst="rect">
-            <a:avLst/>
-          </a:prstGeom>
-        </p:spPr>
-        <p:txBody>
-          <a:bodyPr vert="horz" lIns="91440" tIns="45720" rIns="91440" bIns="45720" rtlCol="0" anchor="b"/>
-          <a:lstStyle>
-            <a:lvl1pPr algn="r">
-              <a:defRPr sz="1200"/>
-            </a:lvl1pPr>
-          </a:lstStyle>
-          <a:p>
-            <a:fld id="{CE5E9CC1-C706-0F49-92D6-E571CC5EEA8F}" type="slidenum">
-              <a:rPr lang="en-US"/>
-              <a:t>‹#›</a:t>
-            </a:fld>
-            <a:endParaRPr lang="en-US"/>
-          </a:p>
-        </p:txBody>
-      </p:sp>
     </p:spTree>
     <p:extLst>
       <p:ext uri="{BB962C8B-B14F-4D97-AF65-F5344CB8AC3E}">
-        <p14:creationId xmlns:p14="http://schemas.microsoft.com/office/powerpoint/2010/main" val="1024086991"/>
+        <p14:creationId xmlns:p14="http://schemas.microsoft.com/office/powerpoint/2010/main" val="2139768395"/>
       </p:ext>
     </p:extLst>
   </p:cSld>
@@ -510,10 +291,6 @@
           <a:bodyPr/>
           <a:lstStyle/>
           <a:p>
-            <a:r>
-              <a:rPr lang="en-US" dirty="0"/>
-              <a:t/>
-            </a:r>
             <a:endParaRPr lang="en-US" dirty="0"/>
           </a:p>
         </p:txBody>
@@ -598,10 +375,6 @@
           <a:bodyPr/>
           <a:lstStyle/>
           <a:p>
-            <a:r>
-              <a:rPr lang="en-US" dirty="0"/>
-              <a:t/>
-            </a:r>
             <a:endParaRPr lang="en-US" dirty="0"/>
           </a:p>
         </p:txBody>
@@ -686,10 +459,6 @@
           <a:bodyPr/>
           <a:lstStyle/>
           <a:p>
-            <a:r>
-              <a:rPr lang="en-US" dirty="0"/>
-              <a:t/>
-            </a:r>
             <a:endParaRPr lang="en-US" dirty="0"/>
           </a:p>
         </p:txBody>
@@ -774,10 +543,6 @@
           <a:bodyPr/>
           <a:lstStyle/>
           <a:p>
-            <a:r>
-              <a:rPr lang="en-US" dirty="0"/>
-              <a:t/>
-            </a:r>
             <a:endParaRPr lang="en-US" dirty="0"/>
           </a:p>
         </p:txBody>
@@ -862,10 +627,6 @@
           <a:bodyPr/>
           <a:lstStyle/>
           <a:p>
-            <a:r>
-              <a:rPr lang="en-US" dirty="0"/>
-              <a:t/>
-            </a:r>
             <a:endParaRPr lang="en-US" dirty="0"/>
           </a:p>
         </p:txBody>
@@ -950,10 +711,6 @@
           <a:bodyPr/>
           <a:lstStyle/>
           <a:p>
-            <a:r>
-              <a:rPr lang="en-US" dirty="0"/>
-              <a:t/>
-            </a:r>
             <a:endParaRPr lang="en-US" dirty="0"/>
           </a:p>
         </p:txBody>
@@ -1038,10 +795,6 @@
           <a:bodyPr/>
           <a:lstStyle/>
           <a:p>
-            <a:r>
-              <a:rPr lang="en-US" dirty="0"/>
-              <a:t/>
-            </a:r>
             <a:endParaRPr lang="en-US" dirty="0"/>
           </a:p>
         </p:txBody>
@@ -1126,10 +879,6 @@
           <a:bodyPr/>
           <a:lstStyle/>
           <a:p>
-            <a:r>
-              <a:rPr lang="en-US" dirty="0"/>
-              <a:t/>
-            </a:r>
             <a:endParaRPr lang="en-US" dirty="0"/>
           </a:p>
         </p:txBody>
@@ -1214,10 +963,6 @@
           <a:bodyPr/>
           <a:lstStyle/>
           <a:p>
-            <a:r>
-              <a:rPr lang="en-US" dirty="0"/>
-              <a:t/>
-            </a:r>
             <a:endParaRPr lang="en-US" dirty="0"/>
           </a:p>
         </p:txBody>
@@ -1302,10 +1047,6 @@
           <a:bodyPr/>
           <a:lstStyle/>
           <a:p>
-            <a:r>
-              <a:rPr lang="en-US" dirty="0"/>
-              <a:t/>
-            </a:r>
             <a:endParaRPr lang="en-US" dirty="0"/>
           </a:p>
         </p:txBody>
@@ -1390,10 +1131,6 @@
           <a:bodyPr/>
           <a:lstStyle/>
           <a:p>
-            <a:r>
-              <a:rPr lang="en-US" dirty="0"/>
-              <a:t/>
-            </a:r>
             <a:endParaRPr lang="en-US" dirty="0"/>
           </a:p>
         </p:txBody>
@@ -1467,6 +1204,11 @@
 <file path=ppt/slideMasters/slideMaster1.xml><?xml version="1.0" encoding="utf-8"?>
 <p:sldMaster xmlns:a="http://schemas.openxmlformats.org/drawingml/2006/main" xmlns:r="http://schemas.openxmlformats.org/officeDocument/2006/relationships" xmlns:p="http://schemas.openxmlformats.org/presentationml/2006/main">
   <p:cSld>
+    <p:bg>
+      <p:bgRef idx="1001">
+        <a:schemeClr val="bg1"/>
+      </p:bgRef>
+    </p:bg>
     <p:spTree>
       <p:nvGrpSpPr>
         <p:cNvPr id="1" name=""/>
@@ -1749,6 +1491,7 @@
         <a:solidFill>
           <a:srgbClr val="FFFFFF"/>
         </a:solidFill>
+        <a:effectLst/>
       </p:bgPr>
     </p:bg>
     <p:spTree>
@@ -1789,6 +1532,13 @@
             <a:prstDash val="solid"/>
           </a:ln>
         </p:spPr>
+        <p:txBody>
+          <a:bodyPr/>
+          <a:lstStyle/>
+          <a:p>
+            <a:endParaRPr lang="en-US"/>
+          </a:p>
+        </p:txBody>
       </p:sp>
       <p:sp>
         <p:nvSpPr>
@@ -1814,6 +1564,13 @@
             <a:prstDash val="solid"/>
           </a:ln>
         </p:spPr>
+        <p:txBody>
+          <a:bodyPr/>
+          <a:lstStyle/>
+          <a:p>
+            <a:endParaRPr lang="en-US"/>
+          </a:p>
+        </p:txBody>
       </p:sp>
       <p:sp>
         <p:nvSpPr>
@@ -1836,7 +1593,7 @@
           <a:bodyPr wrap="square" lIns="0" tIns="0" rIns="0" bIns="0" rtlCol="0" anchor="ctr"/>
           <a:lstStyle/>
           <a:p>
-            <a:pPr indent="0" marL="0">
+            <a:pPr marL="0" indent="0">
               <a:buNone/>
             </a:pPr>
             <a:r>
@@ -1875,7 +1632,7 @@
           <a:bodyPr wrap="square" lIns="0" tIns="0" rIns="0" bIns="0" rtlCol="0" anchor="ctr"/>
           <a:lstStyle/>
           <a:p>
-            <a:pPr indent="0" marL="0">
+            <a:pPr marL="0" indent="0">
               <a:buNone/>
             </a:pPr>
             <a:r>
@@ -1914,7 +1671,7 @@
           <a:bodyPr wrap="square" lIns="0" tIns="0" rIns="0" bIns="0" rtlCol="0" anchor="ctr"/>
           <a:lstStyle/>
           <a:p>
-            <a:pPr indent="0" marL="0">
+            <a:pPr marL="0" indent="0">
               <a:buNone/>
             </a:pPr>
             <a:r>
@@ -1931,7 +1688,7 @@
             <a:endParaRPr lang="en-US" sz="2300" dirty="0"/>
           </a:p>
           <a:p>
-            <a:pPr indent="0" marL="0">
+            <a:pPr marL="0" indent="0">
               <a:buNone/>
             </a:pPr>
             <a:r>
@@ -1970,7 +1727,7 @@
           <a:bodyPr wrap="square" lIns="0" tIns="0" rIns="0" bIns="0" rtlCol="0" anchor="t"/>
           <a:lstStyle/>
           <a:p>
-            <a:pPr indent="0" marL="0">
+            <a:pPr marL="0" indent="0">
               <a:buNone/>
             </a:pPr>
             <a:r>
@@ -2009,9 +1766,20 @@
           <a:bodyPr wrap="square" lIns="0" tIns="0" rIns="0" bIns="0" rtlCol="0" anchor="ctr"/>
           <a:lstStyle/>
           <a:p>
-            <a:pPr indent="0" marL="0">
-              <a:buNone/>
-            </a:pPr>
+            <a:pPr marL="0" indent="0">
+              <a:buNone/>
+            </a:pPr>
+            <a:r>
+              <a:rPr lang="en-US" dirty="0">
+                <a:solidFill>
+                  <a:srgbClr val="191919"/>
+                </a:solidFill>
+                <a:latin typeface="Times New Roman" pitchFamily="34" charset="0"/>
+                <a:ea typeface="Times New Roman" pitchFamily="34" charset="-122"/>
+                <a:cs typeface="Times New Roman" pitchFamily="34" charset="-120"/>
+              </a:rPr>
+              <a:t>M</a:t>
+            </a:r>
             <a:r>
               <a:rPr lang="en-US" sz="1800" dirty="0">
                 <a:solidFill>
@@ -2021,12 +1789,12 @@
                 <a:ea typeface="Times New Roman" pitchFamily="34" charset="-122"/>
                 <a:cs typeface="Times New Roman" pitchFamily="34" charset="-120"/>
               </a:rPr>
-              <a:t>Dr. Manoj Kaushik</a:t>
+              <a:t>r. Manoj Kaushik</a:t>
             </a:r>
             <a:endParaRPr lang="en-US" sz="1800" dirty="0"/>
           </a:p>
           <a:p>
-            <a:pPr indent="0" marL="0">
+            <a:pPr marL="0" indent="0">
               <a:buNone/>
             </a:pPr>
             <a:r>
@@ -2043,7 +1811,7 @@
             <a:endParaRPr lang="en-US" sz="1800" dirty="0"/>
           </a:p>
           <a:p>
-            <a:pPr indent="0" marL="0">
+            <a:pPr marL="0" indent="0">
               <a:buNone/>
             </a:pPr>
             <a:r>
@@ -2087,17 +1855,24 @@
             <a:prstDash val="solid"/>
           </a:ln>
         </p:spPr>
+        <p:txBody>
+          <a:bodyPr/>
+          <a:lstStyle/>
+          <a:p>
+            <a:endParaRPr lang="en-US"/>
+          </a:p>
+        </p:txBody>
       </p:sp>
       <p:pic>
         <p:nvPicPr>
-          <p:cNvPr id="10" name="Image 0" descr="/home/claude/work8/icon8_collection.png">    </p:cNvPr>
+          <p:cNvPr id="10" name="Image 0" descr="/home/claude/work8/icon8_collection.png"/>
           <p:cNvPicPr>
             <a:picLocks noChangeAspect="1"/>
           </p:cNvPicPr>
           <p:nvPr/>
         </p:nvPicPr>
         <p:blipFill>
-          <a:blip r:embed="rId1"/>
+          <a:blip r:embed="rId3"/>
           <a:stretch>
             <a:fillRect/>
           </a:stretch>
@@ -2133,7 +1908,7 @@
           <a:bodyPr wrap="square" lIns="0" tIns="0" rIns="0" bIns="0" rtlCol="0" anchor="t"/>
           <a:lstStyle/>
           <a:p>
-            <a:pPr algn="ctr" indent="0" marL="0">
+            <a:pPr marL="0" indent="0" algn="ctr">
               <a:buNone/>
             </a:pPr>
             <a:r>
@@ -2177,17 +1952,24 @@
             <a:prstDash val="solid"/>
           </a:ln>
         </p:spPr>
+        <p:txBody>
+          <a:bodyPr/>
+          <a:lstStyle/>
+          <a:p>
+            <a:endParaRPr lang="en-US"/>
+          </a:p>
+        </p:txBody>
       </p:sp>
       <p:pic>
         <p:nvPicPr>
-          <p:cNvPr id="13" name="Image 1" descr="/home/claude/work8/icon8_consent.png">    </p:cNvPr>
+          <p:cNvPr id="13" name="Image 1" descr="/home/claude/work8/icon8_consent.png"/>
           <p:cNvPicPr>
             <a:picLocks noChangeAspect="1"/>
           </p:cNvPicPr>
           <p:nvPr/>
         </p:nvPicPr>
         <p:blipFill>
-          <a:blip r:embed="rId2"/>
+          <a:blip r:embed="rId4"/>
           <a:stretch>
             <a:fillRect/>
           </a:stretch>
@@ -2223,7 +2005,7 @@
           <a:bodyPr wrap="square" lIns="0" tIns="0" rIns="0" bIns="0" rtlCol="0" anchor="t"/>
           <a:lstStyle/>
           <a:p>
-            <a:pPr algn="ctr" indent="0" marL="0">
+            <a:pPr marL="0" indent="0" algn="ctr">
               <a:buNone/>
             </a:pPr>
             <a:r>
@@ -2267,17 +2049,24 @@
             <a:prstDash val="solid"/>
           </a:ln>
         </p:spPr>
+        <p:txBody>
+          <a:bodyPr/>
+          <a:lstStyle/>
+          <a:p>
+            <a:endParaRPr lang="en-US"/>
+          </a:p>
+        </p:txBody>
       </p:sp>
       <p:pic>
         <p:nvPicPr>
-          <p:cNvPr id="16" name="Image 2" descr="/home/claude/work8/icon8_profiling.png">    </p:cNvPr>
+          <p:cNvPr id="16" name="Image 2" descr="/home/claude/work8/icon8_profiling.png"/>
           <p:cNvPicPr>
             <a:picLocks noChangeAspect="1"/>
           </p:cNvPicPr>
           <p:nvPr/>
         </p:nvPicPr>
         <p:blipFill>
-          <a:blip r:embed="rId3"/>
+          <a:blip r:embed="rId5"/>
           <a:stretch>
             <a:fillRect/>
           </a:stretch>
@@ -2313,7 +2102,7 @@
           <a:bodyPr wrap="square" lIns="0" tIns="0" rIns="0" bIns="0" rtlCol="0" anchor="t"/>
           <a:lstStyle/>
           <a:p>
-            <a:pPr algn="ctr" indent="0" marL="0">
+            <a:pPr marL="0" indent="0" algn="ctr">
               <a:buNone/>
             </a:pPr>
             <a:r>
@@ -2357,17 +2146,24 @@
             <a:prstDash val="solid"/>
           </a:ln>
         </p:spPr>
+        <p:txBody>
+          <a:bodyPr/>
+          <a:lstStyle/>
+          <a:p>
+            <a:endParaRPr lang="en-US"/>
+          </a:p>
+        </p:txBody>
       </p:sp>
       <p:pic>
         <p:nvPicPr>
-          <p:cNvPr id="19" name="Image 3" descr="/home/claude/work8/icon8_misuse.png">    </p:cNvPr>
+          <p:cNvPr id="19" name="Image 3" descr="/home/claude/work8/icon8_misuse.png"/>
           <p:cNvPicPr>
             <a:picLocks noChangeAspect="1"/>
           </p:cNvPicPr>
           <p:nvPr/>
         </p:nvPicPr>
         <p:blipFill>
-          <a:blip r:embed="rId4"/>
+          <a:blip r:embed="rId6"/>
           <a:stretch>
             <a:fillRect/>
           </a:stretch>
@@ -2403,7 +2199,7 @@
           <a:bodyPr wrap="square" lIns="0" tIns="0" rIns="0" bIns="0" rtlCol="0" anchor="t"/>
           <a:lstStyle/>
           <a:p>
-            <a:pPr algn="ctr" indent="0" marL="0">
+            <a:pPr marL="0" indent="0" algn="ctr">
               <a:buNone/>
             </a:pPr>
             <a:r>
@@ -2442,7 +2238,7 @@
           <a:bodyPr wrap="square" lIns="0" tIns="0" rIns="0" bIns="0" rtlCol="0" anchor="ctr"/>
           <a:lstStyle/>
           <a:p>
-            <a:pPr algn="ctr" indent="0" marL="0">
+            <a:pPr marL="0" indent="0" algn="ctr">
               <a:buNone/>
             </a:pPr>
             <a:r>
@@ -2476,6 +2272,7 @@
         <a:solidFill>
           <a:srgbClr val="FFFFFF"/>
         </a:solidFill>
+        <a:effectLst/>
       </p:bgPr>
     </p:bg>
     <p:spTree>
@@ -2516,6 +2313,13 @@
             <a:prstDash val="solid"/>
           </a:ln>
         </p:spPr>
+        <p:txBody>
+          <a:bodyPr/>
+          <a:lstStyle/>
+          <a:p>
+            <a:endParaRPr lang="en-US"/>
+          </a:p>
+        </p:txBody>
       </p:sp>
       <p:sp>
         <p:nvSpPr>
@@ -2541,6 +2345,13 @@
             <a:prstDash val="solid"/>
           </a:ln>
         </p:spPr>
+        <p:txBody>
+          <a:bodyPr/>
+          <a:lstStyle/>
+          <a:p>
+            <a:endParaRPr lang="en-US"/>
+          </a:p>
+        </p:txBody>
       </p:sp>
       <p:sp>
         <p:nvSpPr>
@@ -2563,7 +2374,7 @@
           <a:bodyPr wrap="square" lIns="0" tIns="0" rIns="0" bIns="0" rtlCol="0" anchor="ctr"/>
           <a:lstStyle/>
           <a:p>
-            <a:pPr indent="0" marL="0">
+            <a:pPr marL="0" indent="0">
               <a:buNone/>
             </a:pPr>
             <a:r>
@@ -2602,7 +2413,7 @@
           <a:bodyPr wrap="square" lIns="0" tIns="0" rIns="0" bIns="0" rtlCol="0" anchor="ctr"/>
           <a:lstStyle/>
           <a:p>
-            <a:pPr algn="r" indent="0" marL="0">
+            <a:pPr marL="0" indent="0" algn="r">
               <a:buNone/>
             </a:pPr>
             <a:r>
@@ -2641,7 +2452,7 @@
           <a:bodyPr wrap="square" lIns="0" tIns="0" rIns="0" bIns="0" rtlCol="0" anchor="ctr"/>
           <a:lstStyle/>
           <a:p>
-            <a:pPr indent="0" marL="0">
+            <a:pPr marL="0" indent="0">
               <a:buNone/>
             </a:pPr>
             <a:r>
@@ -2680,7 +2491,7 @@
           <a:bodyPr wrap="square" lIns="50800" tIns="50800" rIns="50800" bIns="50800" rtlCol="0" anchor="t"/>
           <a:lstStyle/>
           <a:p>
-            <a:pPr indent="0" marL="0">
+            <a:pPr marL="0" indent="0">
               <a:buNone/>
             </a:pPr>
             <a:r>
@@ -2697,13 +2508,13 @@
             <a:endParaRPr lang="en-US" sz="1800" dirty="0"/>
           </a:p>
           <a:p>
-            <a:pPr indent="0" marL="0">
+            <a:pPr marL="0" indent="0">
               <a:buNone/>
             </a:pPr>
             <a:endParaRPr lang="en-US" sz="1800" dirty="0"/>
           </a:p>
           <a:p>
-            <a:pPr indent="0" marL="0">
+            <a:pPr marL="0" indent="0">
               <a:buNone/>
             </a:pPr>
             <a:r>
@@ -2720,13 +2531,13 @@
             <a:endParaRPr lang="en-US" sz="1800" dirty="0"/>
           </a:p>
           <a:p>
-            <a:pPr indent="0" marL="0">
+            <a:pPr marL="0" indent="0">
               <a:buNone/>
             </a:pPr>
             <a:endParaRPr lang="en-US" sz="1800" dirty="0"/>
           </a:p>
           <a:p>
-            <a:pPr indent="0" marL="0">
+            <a:pPr marL="0" indent="0">
               <a:buNone/>
             </a:pPr>
             <a:r>
@@ -2743,13 +2554,13 @@
             <a:endParaRPr lang="en-US" sz="1800" dirty="0"/>
           </a:p>
           <a:p>
-            <a:pPr indent="0" marL="0">
+            <a:pPr marL="0" indent="0">
               <a:buNone/>
             </a:pPr>
             <a:endParaRPr lang="en-US" sz="1800" dirty="0"/>
           </a:p>
           <a:p>
-            <a:pPr indent="0" marL="0">
+            <a:pPr marL="0" indent="0">
               <a:buNone/>
             </a:pPr>
             <a:r>
@@ -2788,7 +2599,7 @@
           <a:bodyPr wrap="square" lIns="0" tIns="0" rIns="0" bIns="0" rtlCol="0" anchor="ctr"/>
           <a:lstStyle/>
           <a:p>
-            <a:pPr algn="ctr" indent="0" marL="0">
+            <a:pPr marL="0" indent="0" algn="ctr">
               <a:buNone/>
             </a:pPr>
             <a:r>
@@ -2822,6 +2633,7 @@
         <a:solidFill>
           <a:srgbClr val="FFFFFF"/>
         </a:solidFill>
+        <a:effectLst/>
       </p:bgPr>
     </p:bg>
     <p:spTree>
@@ -2862,6 +2674,13 @@
             <a:prstDash val="solid"/>
           </a:ln>
         </p:spPr>
+        <p:txBody>
+          <a:bodyPr/>
+          <a:lstStyle/>
+          <a:p>
+            <a:endParaRPr lang="en-US"/>
+          </a:p>
+        </p:txBody>
       </p:sp>
       <p:sp>
         <p:nvSpPr>
@@ -2887,6 +2706,13 @@
             <a:prstDash val="solid"/>
           </a:ln>
         </p:spPr>
+        <p:txBody>
+          <a:bodyPr/>
+          <a:lstStyle/>
+          <a:p>
+            <a:endParaRPr lang="en-US"/>
+          </a:p>
+        </p:txBody>
       </p:sp>
       <p:sp>
         <p:nvSpPr>
@@ -2909,7 +2735,7 @@
           <a:bodyPr wrap="square" lIns="0" tIns="0" rIns="0" bIns="0" rtlCol="0" anchor="ctr"/>
           <a:lstStyle/>
           <a:p>
-            <a:pPr indent="0" marL="0">
+            <a:pPr marL="0" indent="0">
               <a:buNone/>
             </a:pPr>
             <a:r>
@@ -2948,7 +2774,7 @@
           <a:bodyPr wrap="square" lIns="0" tIns="0" rIns="0" bIns="0" rtlCol="0" anchor="ctr"/>
           <a:lstStyle/>
           <a:p>
-            <a:pPr algn="r" indent="0" marL="0">
+            <a:pPr marL="0" indent="0" algn="r">
               <a:buNone/>
             </a:pPr>
             <a:r>
@@ -2987,7 +2813,7 @@
           <a:bodyPr wrap="square" lIns="0" tIns="0" rIns="0" bIns="0" rtlCol="0" anchor="ctr"/>
           <a:lstStyle/>
           <a:p>
-            <a:pPr indent="0" marL="0">
+            <a:pPr marL="0" indent="0">
               <a:buNone/>
             </a:pPr>
             <a:r>
@@ -3026,7 +2852,7 @@
           <a:bodyPr wrap="square" lIns="50800" tIns="50800" rIns="50800" bIns="50800" rtlCol="0" anchor="t"/>
           <a:lstStyle/>
           <a:p>
-            <a:pPr indent="0" marL="0">
+            <a:pPr marL="0" indent="0">
               <a:buNone/>
             </a:pPr>
             <a:r>
@@ -3043,13 +2869,13 @@
             <a:endParaRPr lang="en-US" sz="1800" dirty="0"/>
           </a:p>
           <a:p>
-            <a:pPr indent="0" marL="0">
+            <a:pPr marL="0" indent="0">
               <a:buNone/>
             </a:pPr>
             <a:endParaRPr lang="en-US" sz="1800" dirty="0"/>
           </a:p>
           <a:p>
-            <a:pPr indent="0" marL="0">
+            <a:pPr marL="0" indent="0">
               <a:buNone/>
             </a:pPr>
             <a:r>
@@ -3066,13 +2892,13 @@
             <a:endParaRPr lang="en-US" sz="1800" dirty="0"/>
           </a:p>
           <a:p>
-            <a:pPr indent="0" marL="0">
+            <a:pPr marL="0" indent="0">
               <a:buNone/>
             </a:pPr>
             <a:endParaRPr lang="en-US" sz="1800" dirty="0"/>
           </a:p>
           <a:p>
-            <a:pPr indent="0" marL="0">
+            <a:pPr marL="0" indent="0">
               <a:buNone/>
             </a:pPr>
             <a:r>
@@ -3089,13 +2915,13 @@
             <a:endParaRPr lang="en-US" sz="1800" dirty="0"/>
           </a:p>
           <a:p>
-            <a:pPr indent="0" marL="0">
+            <a:pPr marL="0" indent="0">
               <a:buNone/>
             </a:pPr>
             <a:endParaRPr lang="en-US" sz="1800" dirty="0"/>
           </a:p>
           <a:p>
-            <a:pPr indent="0" marL="0">
+            <a:pPr marL="0" indent="0">
               <a:buNone/>
             </a:pPr>
             <a:r>
@@ -3134,7 +2960,7 @@
           <a:bodyPr wrap="square" lIns="0" tIns="0" rIns="0" bIns="0" rtlCol="0" anchor="ctr"/>
           <a:lstStyle/>
           <a:p>
-            <a:pPr algn="ctr" indent="0" marL="0">
+            <a:pPr marL="0" indent="0" algn="ctr">
               <a:buNone/>
             </a:pPr>
             <a:r>
@@ -3168,6 +2994,7 @@
         <a:solidFill>
           <a:srgbClr val="FFFFFF"/>
         </a:solidFill>
+        <a:effectLst/>
       </p:bgPr>
     </p:bg>
     <p:spTree>
@@ -3208,6 +3035,13 @@
             <a:prstDash val="solid"/>
           </a:ln>
         </p:spPr>
+        <p:txBody>
+          <a:bodyPr/>
+          <a:lstStyle/>
+          <a:p>
+            <a:endParaRPr lang="en-US"/>
+          </a:p>
+        </p:txBody>
       </p:sp>
       <p:sp>
         <p:nvSpPr>
@@ -3233,6 +3067,13 @@
             <a:prstDash val="solid"/>
           </a:ln>
         </p:spPr>
+        <p:txBody>
+          <a:bodyPr/>
+          <a:lstStyle/>
+          <a:p>
+            <a:endParaRPr lang="en-US"/>
+          </a:p>
+        </p:txBody>
       </p:sp>
       <p:sp>
         <p:nvSpPr>
@@ -3255,7 +3096,7 @@
           <a:bodyPr wrap="square" lIns="0" tIns="0" rIns="0" bIns="0" rtlCol="0" anchor="ctr"/>
           <a:lstStyle/>
           <a:p>
-            <a:pPr indent="0" marL="0">
+            <a:pPr marL="0" indent="0">
               <a:buNone/>
             </a:pPr>
             <a:r>
@@ -3294,7 +3135,7 @@
           <a:bodyPr wrap="square" lIns="0" tIns="0" rIns="0" bIns="0" rtlCol="0" anchor="ctr"/>
           <a:lstStyle/>
           <a:p>
-            <a:pPr algn="r" indent="0" marL="0">
+            <a:pPr marL="0" indent="0" algn="r">
               <a:buNone/>
             </a:pPr>
             <a:r>
@@ -3333,7 +3174,7 @@
           <a:bodyPr wrap="square" lIns="0" tIns="0" rIns="0" bIns="0" rtlCol="0" anchor="ctr"/>
           <a:lstStyle/>
           <a:p>
-            <a:pPr indent="0" marL="0">
+            <a:pPr marL="0" indent="0">
               <a:buNone/>
             </a:pPr>
             <a:r>
@@ -3372,7 +3213,7 @@
           <a:bodyPr wrap="square" lIns="50800" tIns="50800" rIns="50800" bIns="50800" rtlCol="0" anchor="t"/>
           <a:lstStyle/>
           <a:p>
-            <a:pPr indent="0" marL="0">
+            <a:pPr marL="0" indent="0">
               <a:buNone/>
             </a:pPr>
             <a:r>
@@ -3389,13 +3230,13 @@
             <a:endParaRPr lang="en-US" sz="1800" dirty="0"/>
           </a:p>
           <a:p>
-            <a:pPr indent="0" marL="0">
+            <a:pPr marL="0" indent="0">
               <a:buNone/>
             </a:pPr>
             <a:endParaRPr lang="en-US" sz="1800" dirty="0"/>
           </a:p>
           <a:p>
-            <a:pPr indent="0" marL="0">
+            <a:pPr marL="0" indent="0">
               <a:buNone/>
             </a:pPr>
             <a:r>
@@ -3412,13 +3253,13 @@
             <a:endParaRPr lang="en-US" sz="1800" dirty="0"/>
           </a:p>
           <a:p>
-            <a:pPr indent="0" marL="0">
+            <a:pPr marL="0" indent="0">
               <a:buNone/>
             </a:pPr>
             <a:endParaRPr lang="en-US" sz="1800" dirty="0"/>
           </a:p>
           <a:p>
-            <a:pPr indent="0" marL="0">
+            <a:pPr marL="0" indent="0">
               <a:buNone/>
             </a:pPr>
             <a:r>
@@ -3435,13 +3276,13 @@
             <a:endParaRPr lang="en-US" sz="1800" dirty="0"/>
           </a:p>
           <a:p>
-            <a:pPr indent="0" marL="0">
+            <a:pPr marL="0" indent="0">
               <a:buNone/>
             </a:pPr>
             <a:endParaRPr lang="en-US" sz="1800" dirty="0"/>
           </a:p>
           <a:p>
-            <a:pPr indent="0" marL="0">
+            <a:pPr marL="0" indent="0">
               <a:buNone/>
             </a:pPr>
             <a:r>
@@ -3480,7 +3321,7 @@
           <a:bodyPr wrap="square" lIns="0" tIns="0" rIns="0" bIns="0" rtlCol="0" anchor="ctr"/>
           <a:lstStyle/>
           <a:p>
-            <a:pPr algn="ctr" indent="0" marL="0">
+            <a:pPr marL="0" indent="0" algn="ctr">
               <a:buNone/>
             </a:pPr>
             <a:r>
@@ -3514,6 +3355,7 @@
         <a:solidFill>
           <a:srgbClr val="FFFFFF"/>
         </a:solidFill>
+        <a:effectLst/>
       </p:bgPr>
     </p:bg>
     <p:spTree>
@@ -3554,6 +3396,13 @@
             <a:prstDash val="solid"/>
           </a:ln>
         </p:spPr>
+        <p:txBody>
+          <a:bodyPr/>
+          <a:lstStyle/>
+          <a:p>
+            <a:endParaRPr lang="en-US"/>
+          </a:p>
+        </p:txBody>
       </p:sp>
       <p:sp>
         <p:nvSpPr>
@@ -3579,6 +3428,13 @@
             <a:prstDash val="solid"/>
           </a:ln>
         </p:spPr>
+        <p:txBody>
+          <a:bodyPr/>
+          <a:lstStyle/>
+          <a:p>
+            <a:endParaRPr lang="en-US"/>
+          </a:p>
+        </p:txBody>
       </p:sp>
       <p:sp>
         <p:nvSpPr>
@@ -3601,7 +3457,7 @@
           <a:bodyPr wrap="square" lIns="0" tIns="0" rIns="0" bIns="0" rtlCol="0" anchor="ctr"/>
           <a:lstStyle/>
           <a:p>
-            <a:pPr indent="0" marL="0">
+            <a:pPr marL="0" indent="0">
               <a:buNone/>
             </a:pPr>
             <a:r>
@@ -3640,7 +3496,7 @@
           <a:bodyPr wrap="square" lIns="0" tIns="0" rIns="0" bIns="0" rtlCol="0" anchor="ctr"/>
           <a:lstStyle/>
           <a:p>
-            <a:pPr algn="r" indent="0" marL="0">
+            <a:pPr marL="0" indent="0" algn="r">
               <a:buNone/>
             </a:pPr>
             <a:r>
@@ -3679,7 +3535,7 @@
           <a:bodyPr wrap="square" lIns="0" tIns="0" rIns="0" bIns="0" rtlCol="0" anchor="ctr"/>
           <a:lstStyle/>
           <a:p>
-            <a:pPr indent="0" marL="0">
+            <a:pPr marL="0" indent="0">
               <a:buNone/>
             </a:pPr>
             <a:r>
@@ -3699,7 +3555,7 @@
       </p:sp>
       <p:graphicFrame>
         <p:nvGraphicFramePr>
-          <p:cNvPr id="4" name="Table 0"/>
+          <p:cNvPr id="7" name="Table 0"/>
           <p:cNvGraphicFramePr>
             <a:graphicFrameLocks noGrp="1"/>
           </p:cNvGraphicFramePr>
@@ -3720,8 +3576,20 @@
             <a:tbl>
               <a:tblPr/>
               <a:tblGrid>
-                <a:gridCol w="2651760"/>
-                <a:gridCol w="7955280"/>
+                <a:gridCol w="2651760">
+                  <a:extLst>
+                    <a:ext uri="{9D8B030D-6E8A-4147-A177-3AD203B41FA5}">
+                      <a16:colId xmlns:a16="http://schemas.microsoft.com/office/drawing/2014/main" val="20000"/>
+                    </a:ext>
+                  </a:extLst>
+                </a:gridCol>
+                <a:gridCol w="7955280">
+                  <a:extLst>
+                    <a:ext uri="{9D8B030D-6E8A-4147-A177-3AD203B41FA5}">
+                      <a16:colId xmlns:a16="http://schemas.microsoft.com/office/drawing/2014/main" val="20001"/>
+                    </a:ext>
+                  </a:extLst>
+                </a:gridCol>
               </a:tblGrid>
               <a:tr h="982980">
                 <a:tc>
@@ -3729,7 +3597,7 @@
                     <a:bodyPr/>
                     <a:lstStyle/>
                     <a:p>
-                      <a:pPr algn="ctr" indent="0" marL="0">
+                      <a:pPr marL="0" indent="0" algn="ctr">
                         <a:buNone/>
                       </a:pPr>
                       <a:r>
@@ -3750,7 +3618,7 @@
                       </a:endParaRPr>
                     </a:p>
                   </a:txBody>
-                  <a:tcPr marL="91440" marR="91440" marT="45720" marB="45720" anchor="ctr">
+                  <a:tcPr anchor="ctr">
                     <a:lnL w="25400" cap="flat" cmpd="sng" algn="ctr">
                       <a:solidFill>
                         <a:srgbClr val="FFFFFF"/>
@@ -3797,7 +3665,7 @@
                     <a:bodyPr/>
                     <a:lstStyle/>
                     <a:p>
-                      <a:pPr algn="ctr" indent="0" marL="0">
+                      <a:pPr marL="0" indent="0" algn="ctr">
                         <a:buNone/>
                       </a:pPr>
                       <a:r>
@@ -3818,7 +3686,7 @@
                       </a:endParaRPr>
                     </a:p>
                   </a:txBody>
-                  <a:tcPr marL="91440" marR="91440" marT="45720" marB="45720" anchor="ctr">
+                  <a:tcPr anchor="ctr">
                     <a:lnL w="25400" cap="flat" cmpd="sng" algn="ctr">
                       <a:solidFill>
                         <a:srgbClr val="FFFFFF"/>
@@ -3860,6 +3728,11 @@
                     </a:solidFill>
                   </a:tcPr>
                 </a:tc>
+                <a:extLst>
+                  <a:ext uri="{0D108BD9-81ED-4DB2-BD59-A6C34878D82A}">
+                    <a16:rowId xmlns:a16="http://schemas.microsoft.com/office/drawing/2014/main" val="10000"/>
+                  </a:ext>
+                </a:extLst>
               </a:tr>
               <a:tr h="982980">
                 <a:tc>
@@ -3867,7 +3740,7 @@
                     <a:bodyPr/>
                     <a:lstStyle/>
                     <a:p>
-                      <a:pPr algn="ctr" indent="0" marL="0">
+                      <a:pPr marL="0" indent="0" algn="ctr">
                         <a:buNone/>
                       </a:pPr>
                       <a:r>
@@ -3888,7 +3761,7 @@
                       </a:endParaRPr>
                     </a:p>
                     <a:p>
-                      <a:pPr algn="ctr" indent="0" marL="0">
+                      <a:pPr marL="0" indent="0" algn="ctr">
                         <a:buNone/>
                       </a:pPr>
                       <a:r>
@@ -3909,7 +3782,7 @@
                       </a:endParaRPr>
                     </a:p>
                   </a:txBody>
-                  <a:tcPr marL="91440" marR="91440" marT="45720" marB="45720" anchor="ctr">
+                  <a:tcPr anchor="ctr">
                     <a:lnL w="25400" cap="flat" cmpd="sng" algn="ctr">
                       <a:solidFill>
                         <a:srgbClr val="FFFFFF"/>
@@ -3956,7 +3829,7 @@
                     <a:bodyPr/>
                     <a:lstStyle/>
                     <a:p>
-                      <a:pPr algn="l" indent="0" marL="0">
+                      <a:pPr marL="0" indent="0" algn="l">
                         <a:buNone/>
                       </a:pPr>
                       <a:r>
@@ -3977,7 +3850,7 @@
                       </a:endParaRPr>
                     </a:p>
                   </a:txBody>
-                  <a:tcPr marL="91440" marR="91440" marT="45720" marB="45720" anchor="ctr">
+                  <a:tcPr anchor="ctr">
                     <a:lnL w="25400" cap="flat" cmpd="sng" algn="ctr">
                       <a:solidFill>
                         <a:srgbClr val="FFFFFF"/>
@@ -4019,6 +3892,11 @@
                     </a:solidFill>
                   </a:tcPr>
                 </a:tc>
+                <a:extLst>
+                  <a:ext uri="{0D108BD9-81ED-4DB2-BD59-A6C34878D82A}">
+                    <a16:rowId xmlns:a16="http://schemas.microsoft.com/office/drawing/2014/main" val="10001"/>
+                  </a:ext>
+                </a:extLst>
               </a:tr>
               <a:tr h="982980">
                 <a:tc>
@@ -4026,7 +3904,7 @@
                     <a:bodyPr/>
                     <a:lstStyle/>
                     <a:p>
-                      <a:pPr algn="ctr" indent="0" marL="0">
+                      <a:pPr marL="0" indent="0" algn="ctr">
                         <a:buNone/>
                       </a:pPr>
                       <a:r>
@@ -4047,7 +3925,7 @@
                       </a:endParaRPr>
                     </a:p>
                     <a:p>
-                      <a:pPr algn="ctr" indent="0" marL="0">
+                      <a:pPr marL="0" indent="0" algn="ctr">
                         <a:buNone/>
                       </a:pPr>
                       <a:r>
@@ -4068,7 +3946,7 @@
                       </a:endParaRPr>
                     </a:p>
                   </a:txBody>
-                  <a:tcPr marL="91440" marR="91440" marT="45720" marB="45720" anchor="ctr">
+                  <a:tcPr anchor="ctr">
                     <a:lnL w="25400" cap="flat" cmpd="sng" algn="ctr">
                       <a:solidFill>
                         <a:srgbClr val="FFFFFF"/>
@@ -4115,7 +3993,7 @@
                     <a:bodyPr/>
                     <a:lstStyle/>
                     <a:p>
-                      <a:pPr algn="l" indent="0" marL="0">
+                      <a:pPr marL="0" indent="0" algn="l">
                         <a:buNone/>
                       </a:pPr>
                       <a:r>
@@ -4136,7 +4014,7 @@
                       </a:endParaRPr>
                     </a:p>
                   </a:txBody>
-                  <a:tcPr marL="91440" marR="91440" marT="45720" marB="45720" anchor="ctr">
+                  <a:tcPr anchor="ctr">
                     <a:lnL w="25400" cap="flat" cmpd="sng" algn="ctr">
                       <a:solidFill>
                         <a:srgbClr val="FFFFFF"/>
@@ -4178,6 +4056,11 @@
                     </a:solidFill>
                   </a:tcPr>
                 </a:tc>
+                <a:extLst>
+                  <a:ext uri="{0D108BD9-81ED-4DB2-BD59-A6C34878D82A}">
+                    <a16:rowId xmlns:a16="http://schemas.microsoft.com/office/drawing/2014/main" val="10002"/>
+                  </a:ext>
+                </a:extLst>
               </a:tr>
               <a:tr h="982980">
                 <a:tc>
@@ -4185,7 +4068,7 @@
                     <a:bodyPr/>
                     <a:lstStyle/>
                     <a:p>
-                      <a:pPr algn="ctr" indent="0" marL="0">
+                      <a:pPr marL="0" indent="0" algn="ctr">
                         <a:buNone/>
                       </a:pPr>
                       <a:r>
@@ -4206,7 +4089,7 @@
                       </a:endParaRPr>
                     </a:p>
                     <a:p>
-                      <a:pPr algn="ctr" indent="0" marL="0">
+                      <a:pPr marL="0" indent="0" algn="ctr">
                         <a:buNone/>
                       </a:pPr>
                       <a:r>
@@ -4227,7 +4110,7 @@
                       </a:endParaRPr>
                     </a:p>
                   </a:txBody>
-                  <a:tcPr marL="91440" marR="91440" marT="45720" marB="45720" anchor="ctr">
+                  <a:tcPr anchor="ctr">
                     <a:lnL w="25400" cap="flat" cmpd="sng" algn="ctr">
                       <a:solidFill>
                         <a:srgbClr val="FFFFFF"/>
@@ -4274,7 +4157,7 @@
                     <a:bodyPr/>
                     <a:lstStyle/>
                     <a:p>
-                      <a:pPr algn="l" indent="0" marL="0">
+                      <a:pPr marL="0" indent="0" algn="l">
                         <a:buNone/>
                       </a:pPr>
                       <a:r>
@@ -4295,7 +4178,7 @@
                       </a:endParaRPr>
                     </a:p>
                   </a:txBody>
-                  <a:tcPr marL="91440" marR="91440" marT="45720" marB="45720" anchor="ctr">
+                  <a:tcPr anchor="ctr">
                     <a:lnL w="25400" cap="flat" cmpd="sng" algn="ctr">
                       <a:solidFill>
                         <a:srgbClr val="FFFFFF"/>
@@ -4337,6 +4220,11 @@
                     </a:solidFill>
                   </a:tcPr>
                 </a:tc>
+                <a:extLst>
+                  <a:ext uri="{0D108BD9-81ED-4DB2-BD59-A6C34878D82A}">
+                    <a16:rowId xmlns:a16="http://schemas.microsoft.com/office/drawing/2014/main" val="10003"/>
+                  </a:ext>
+                </a:extLst>
               </a:tr>
             </a:tbl>
           </a:graphicData>
@@ -4363,7 +4251,7 @@
           <a:bodyPr wrap="square" lIns="0" tIns="0" rIns="0" bIns="0" rtlCol="0" anchor="ctr"/>
           <a:lstStyle/>
           <a:p>
-            <a:pPr algn="ctr" indent="0" marL="0">
+            <a:pPr marL="0" indent="0" algn="ctr">
               <a:buNone/>
             </a:pPr>
             <a:r>
@@ -4397,6 +4285,7 @@
         <a:solidFill>
           <a:srgbClr val="FFFFFF"/>
         </a:solidFill>
+        <a:effectLst/>
       </p:bgPr>
     </p:bg>
     <p:spTree>
@@ -4437,6 +4326,13 @@
             <a:prstDash val="solid"/>
           </a:ln>
         </p:spPr>
+        <p:txBody>
+          <a:bodyPr/>
+          <a:lstStyle/>
+          <a:p>
+            <a:endParaRPr lang="en-US"/>
+          </a:p>
+        </p:txBody>
       </p:sp>
       <p:sp>
         <p:nvSpPr>
@@ -4462,6 +4358,13 @@
             <a:prstDash val="solid"/>
           </a:ln>
         </p:spPr>
+        <p:txBody>
+          <a:bodyPr/>
+          <a:lstStyle/>
+          <a:p>
+            <a:endParaRPr lang="en-US"/>
+          </a:p>
+        </p:txBody>
       </p:sp>
       <p:sp>
         <p:nvSpPr>
@@ -4484,7 +4387,7 @@
           <a:bodyPr wrap="square" lIns="0" tIns="0" rIns="0" bIns="0" rtlCol="0" anchor="ctr"/>
           <a:lstStyle/>
           <a:p>
-            <a:pPr indent="0" marL="0">
+            <a:pPr marL="0" indent="0">
               <a:buNone/>
             </a:pPr>
             <a:r>
@@ -4523,7 +4426,7 @@
           <a:bodyPr wrap="square" lIns="0" tIns="0" rIns="0" bIns="0" rtlCol="0" anchor="ctr"/>
           <a:lstStyle/>
           <a:p>
-            <a:pPr algn="r" indent="0" marL="0">
+            <a:pPr marL="0" indent="0" algn="r">
               <a:buNone/>
             </a:pPr>
             <a:r>
@@ -4562,7 +4465,7 @@
           <a:bodyPr wrap="square" lIns="0" tIns="0" rIns="0" bIns="0" rtlCol="0" anchor="ctr"/>
           <a:lstStyle/>
           <a:p>
-            <a:pPr indent="0" marL="0">
+            <a:pPr marL="0" indent="0">
               <a:buNone/>
             </a:pPr>
             <a:r>
@@ -4601,7 +4504,7 @@
           <a:bodyPr wrap="square" lIns="50800" tIns="50800" rIns="50800" bIns="50800" rtlCol="0" anchor="t"/>
           <a:lstStyle/>
           <a:p>
-            <a:pPr indent="0" marL="0">
+            <a:pPr marL="0" indent="0">
               <a:buNone/>
             </a:pPr>
             <a:r>
@@ -4618,13 +4521,13 @@
             <a:endParaRPr lang="en-US" sz="1800" dirty="0"/>
           </a:p>
           <a:p>
-            <a:pPr indent="0" marL="0">
+            <a:pPr marL="0" indent="0">
               <a:buNone/>
             </a:pPr>
             <a:endParaRPr lang="en-US" sz="1800" dirty="0"/>
           </a:p>
           <a:p>
-            <a:pPr indent="0" marL="0">
+            <a:pPr marL="0" indent="0">
               <a:buNone/>
             </a:pPr>
             <a:r>
@@ -4641,13 +4544,13 @@
             <a:endParaRPr lang="en-US" sz="1800" dirty="0"/>
           </a:p>
           <a:p>
-            <a:pPr indent="0" marL="0">
+            <a:pPr marL="0" indent="0">
               <a:buNone/>
             </a:pPr>
             <a:endParaRPr lang="en-US" sz="1800" dirty="0"/>
           </a:p>
           <a:p>
-            <a:pPr indent="0" marL="0">
+            <a:pPr marL="0" indent="0">
               <a:buNone/>
             </a:pPr>
             <a:r>
@@ -4664,13 +4567,13 @@
             <a:endParaRPr lang="en-US" sz="1800" dirty="0"/>
           </a:p>
           <a:p>
-            <a:pPr indent="0" marL="0">
+            <a:pPr marL="0" indent="0">
               <a:buNone/>
             </a:pPr>
             <a:endParaRPr lang="en-US" sz="1800" dirty="0"/>
           </a:p>
           <a:p>
-            <a:pPr indent="0" marL="0">
+            <a:pPr marL="0" indent="0">
               <a:buNone/>
             </a:pPr>
             <a:r>
@@ -4709,7 +4612,7 @@
           <a:bodyPr wrap="square" lIns="0" tIns="0" rIns="0" bIns="0" rtlCol="0" anchor="ctr"/>
           <a:lstStyle/>
           <a:p>
-            <a:pPr algn="ctr" indent="0" marL="0">
+            <a:pPr marL="0" indent="0" algn="ctr">
               <a:buNone/>
             </a:pPr>
             <a:r>
@@ -4743,6 +4646,7 @@
         <a:solidFill>
           <a:srgbClr val="FFFFFF"/>
         </a:solidFill>
+        <a:effectLst/>
       </p:bgPr>
     </p:bg>
     <p:spTree>
@@ -4783,6 +4687,13 @@
             <a:prstDash val="solid"/>
           </a:ln>
         </p:spPr>
+        <p:txBody>
+          <a:bodyPr/>
+          <a:lstStyle/>
+          <a:p>
+            <a:endParaRPr lang="en-US"/>
+          </a:p>
+        </p:txBody>
       </p:sp>
       <p:sp>
         <p:nvSpPr>
@@ -4808,6 +4719,13 @@
             <a:prstDash val="solid"/>
           </a:ln>
         </p:spPr>
+        <p:txBody>
+          <a:bodyPr/>
+          <a:lstStyle/>
+          <a:p>
+            <a:endParaRPr lang="en-US"/>
+          </a:p>
+        </p:txBody>
       </p:sp>
       <p:sp>
         <p:nvSpPr>
@@ -4830,7 +4748,7 @@
           <a:bodyPr wrap="square" lIns="0" tIns="0" rIns="0" bIns="0" rtlCol="0" anchor="ctr"/>
           <a:lstStyle/>
           <a:p>
-            <a:pPr indent="0" marL="0">
+            <a:pPr marL="0" indent="0">
               <a:buNone/>
             </a:pPr>
             <a:r>
@@ -4869,7 +4787,7 @@
           <a:bodyPr wrap="square" lIns="0" tIns="0" rIns="0" bIns="0" rtlCol="0" anchor="ctr"/>
           <a:lstStyle/>
           <a:p>
-            <a:pPr algn="r" indent="0" marL="0">
+            <a:pPr marL="0" indent="0" algn="r">
               <a:buNone/>
             </a:pPr>
             <a:r>
@@ -4908,7 +4826,7 @@
           <a:bodyPr wrap="square" lIns="0" tIns="0" rIns="0" bIns="0" rtlCol="0" anchor="ctr"/>
           <a:lstStyle/>
           <a:p>
-            <a:pPr indent="0" marL="0">
+            <a:pPr marL="0" indent="0">
               <a:buNone/>
             </a:pPr>
             <a:r>
@@ -4947,7 +4865,7 @@
           <a:bodyPr wrap="square" lIns="50800" tIns="50800" rIns="50800" bIns="50800" rtlCol="0" anchor="t"/>
           <a:lstStyle/>
           <a:p>
-            <a:pPr indent="0" marL="0">
+            <a:pPr marL="0" indent="0">
               <a:buNone/>
             </a:pPr>
             <a:r>
@@ -4964,13 +4882,13 @@
             <a:endParaRPr lang="en-US" sz="1800" dirty="0"/>
           </a:p>
           <a:p>
-            <a:pPr indent="0" marL="0">
+            <a:pPr marL="0" indent="0">
               <a:buNone/>
             </a:pPr>
             <a:endParaRPr lang="en-US" sz="1800" dirty="0"/>
           </a:p>
           <a:p>
-            <a:pPr indent="0" marL="0">
+            <a:pPr marL="0" indent="0">
               <a:buNone/>
             </a:pPr>
             <a:r>
@@ -4987,13 +4905,13 @@
             <a:endParaRPr lang="en-US" sz="1800" dirty="0"/>
           </a:p>
           <a:p>
-            <a:pPr indent="0" marL="0">
+            <a:pPr marL="0" indent="0">
               <a:buNone/>
             </a:pPr>
             <a:endParaRPr lang="en-US" sz="1800" dirty="0"/>
           </a:p>
           <a:p>
-            <a:pPr indent="0" marL="0">
+            <a:pPr marL="0" indent="0">
               <a:buNone/>
             </a:pPr>
             <a:r>
@@ -5010,13 +4928,13 @@
             <a:endParaRPr lang="en-US" sz="1800" dirty="0"/>
           </a:p>
           <a:p>
-            <a:pPr indent="0" marL="0">
+            <a:pPr marL="0" indent="0">
               <a:buNone/>
             </a:pPr>
             <a:endParaRPr lang="en-US" sz="1800" dirty="0"/>
           </a:p>
           <a:p>
-            <a:pPr indent="0" marL="0">
+            <a:pPr marL="0" indent="0">
               <a:buNone/>
             </a:pPr>
             <a:r>
@@ -5055,7 +4973,7 @@
           <a:bodyPr wrap="square" lIns="0" tIns="0" rIns="0" bIns="0" rtlCol="0" anchor="ctr"/>
           <a:lstStyle/>
           <a:p>
-            <a:pPr algn="ctr" indent="0" marL="0">
+            <a:pPr marL="0" indent="0" algn="ctr">
               <a:buNone/>
             </a:pPr>
             <a:r>
@@ -5089,6 +5007,7 @@
         <a:solidFill>
           <a:srgbClr val="FFFFFF"/>
         </a:solidFill>
+        <a:effectLst/>
       </p:bgPr>
     </p:bg>
     <p:spTree>
@@ -5129,6 +5048,13 @@
             <a:prstDash val="solid"/>
           </a:ln>
         </p:spPr>
+        <p:txBody>
+          <a:bodyPr/>
+          <a:lstStyle/>
+          <a:p>
+            <a:endParaRPr lang="en-US"/>
+          </a:p>
+        </p:txBody>
       </p:sp>
       <p:sp>
         <p:nvSpPr>
@@ -5154,6 +5080,13 @@
             <a:prstDash val="solid"/>
           </a:ln>
         </p:spPr>
+        <p:txBody>
+          <a:bodyPr/>
+          <a:lstStyle/>
+          <a:p>
+            <a:endParaRPr lang="en-US"/>
+          </a:p>
+        </p:txBody>
       </p:sp>
       <p:sp>
         <p:nvSpPr>
@@ -5176,7 +5109,7 @@
           <a:bodyPr wrap="square" lIns="0" tIns="0" rIns="0" bIns="0" rtlCol="0" anchor="ctr"/>
           <a:lstStyle/>
           <a:p>
-            <a:pPr indent="0" marL="0">
+            <a:pPr marL="0" indent="0">
               <a:buNone/>
             </a:pPr>
             <a:r>
@@ -5215,7 +5148,7 @@
           <a:bodyPr wrap="square" lIns="0" tIns="0" rIns="0" bIns="0" rtlCol="0" anchor="ctr"/>
           <a:lstStyle/>
           <a:p>
-            <a:pPr algn="r" indent="0" marL="0">
+            <a:pPr marL="0" indent="0" algn="r">
               <a:buNone/>
             </a:pPr>
             <a:r>
@@ -5254,7 +5187,7 @@
           <a:bodyPr wrap="square" lIns="0" tIns="0" rIns="0" bIns="0" rtlCol="0" anchor="ctr"/>
           <a:lstStyle/>
           <a:p>
-            <a:pPr indent="0" marL="0">
+            <a:pPr marL="0" indent="0">
               <a:buNone/>
             </a:pPr>
             <a:r>
@@ -5295,8 +5228,20 @@
             <a:tbl>
               <a:tblPr/>
               <a:tblGrid>
-                <a:gridCol w="5623560"/>
-                <a:gridCol w="5623560"/>
+                <a:gridCol w="5623560">
+                  <a:extLst>
+                    <a:ext uri="{9D8B030D-6E8A-4147-A177-3AD203B41FA5}">
+                      <a16:colId xmlns:a16="http://schemas.microsoft.com/office/drawing/2014/main" val="20000"/>
+                    </a:ext>
+                  </a:extLst>
+                </a:gridCol>
+                <a:gridCol w="5623560">
+                  <a:extLst>
+                    <a:ext uri="{9D8B030D-6E8A-4147-A177-3AD203B41FA5}">
+                      <a16:colId xmlns:a16="http://schemas.microsoft.com/office/drawing/2014/main" val="20001"/>
+                    </a:ext>
+                  </a:extLst>
+                </a:gridCol>
               </a:tblGrid>
               <a:tr h="1005840">
                 <a:tc>
@@ -5304,7 +5249,7 @@
                     <a:bodyPr/>
                     <a:lstStyle/>
                     <a:p>
-                      <a:pPr algn="ctr" indent="0" marL="0">
+                      <a:pPr marL="0" indent="0" algn="ctr">
                         <a:buNone/>
                       </a:pPr>
                       <a:r>
@@ -5325,7 +5270,7 @@
                       </a:endParaRPr>
                     </a:p>
                   </a:txBody>
-                  <a:tcPr marL="91440" marR="91440" marT="45720" marB="45720" anchor="ctr">
+                  <a:tcPr anchor="ctr">
                     <a:lnL w="25400" cap="flat" cmpd="sng" algn="ctr">
                       <a:solidFill>
                         <a:srgbClr val="FFFFFF"/>
@@ -5372,7 +5317,7 @@
                     <a:bodyPr/>
                     <a:lstStyle/>
                     <a:p>
-                      <a:pPr algn="ctr" indent="0" marL="0">
+                      <a:pPr marL="0" indent="0" algn="ctr">
                         <a:buNone/>
                       </a:pPr>
                       <a:r>
@@ -5393,7 +5338,7 @@
                       </a:endParaRPr>
                     </a:p>
                   </a:txBody>
-                  <a:tcPr marL="91440" marR="91440" marT="45720" marB="45720" anchor="ctr">
+                  <a:tcPr anchor="ctr">
                     <a:lnL w="25400" cap="flat" cmpd="sng" algn="ctr">
                       <a:solidFill>
                         <a:srgbClr val="FFFFFF"/>
@@ -5435,6 +5380,11 @@
                     </a:solidFill>
                   </a:tcPr>
                 </a:tc>
+                <a:extLst>
+                  <a:ext uri="{0D108BD9-81ED-4DB2-BD59-A6C34878D82A}">
+                    <a16:rowId xmlns:a16="http://schemas.microsoft.com/office/drawing/2014/main" val="10000"/>
+                  </a:ext>
+                </a:extLst>
               </a:tr>
               <a:tr h="1005840">
                 <a:tc>
@@ -5442,7 +5392,7 @@
                     <a:bodyPr/>
                     <a:lstStyle/>
                     <a:p>
-                      <a:pPr algn="l" indent="0" marL="0">
+                      <a:pPr marL="0" indent="0" algn="l">
                         <a:buNone/>
                       </a:pPr>
                       <a:r>
@@ -5463,7 +5413,7 @@
                       </a:endParaRPr>
                     </a:p>
                   </a:txBody>
-                  <a:tcPr marL="91440" marR="91440" marT="45720" marB="45720" anchor="ctr">
+                  <a:tcPr anchor="ctr">
                     <a:lnL w="25400" cap="flat" cmpd="sng" algn="ctr">
                       <a:solidFill>
                         <a:srgbClr val="FFFFFF"/>
@@ -5510,7 +5460,7 @@
                     <a:bodyPr/>
                     <a:lstStyle/>
                     <a:p>
-                      <a:pPr algn="l" indent="0" marL="0">
+                      <a:pPr marL="0" indent="0" algn="l">
                         <a:buNone/>
                       </a:pPr>
                       <a:r>
@@ -5531,7 +5481,7 @@
                       </a:endParaRPr>
                     </a:p>
                   </a:txBody>
-                  <a:tcPr marL="91440" marR="91440" marT="45720" marB="45720" anchor="ctr">
+                  <a:tcPr anchor="ctr">
                     <a:lnL w="25400" cap="flat" cmpd="sng" algn="ctr">
                       <a:solidFill>
                         <a:srgbClr val="FFFFFF"/>
@@ -5573,6 +5523,11 @@
                     </a:solidFill>
                   </a:tcPr>
                 </a:tc>
+                <a:extLst>
+                  <a:ext uri="{0D108BD9-81ED-4DB2-BD59-A6C34878D82A}">
+                    <a16:rowId xmlns:a16="http://schemas.microsoft.com/office/drawing/2014/main" val="10001"/>
+                  </a:ext>
+                </a:extLst>
               </a:tr>
               <a:tr h="1005840">
                 <a:tc>
@@ -5580,7 +5535,7 @@
                     <a:bodyPr/>
                     <a:lstStyle/>
                     <a:p>
-                      <a:pPr algn="l" indent="0" marL="0">
+                      <a:pPr marL="0" indent="0" algn="l">
                         <a:buNone/>
                       </a:pPr>
                       <a:r>
@@ -5601,7 +5556,7 @@
                       </a:endParaRPr>
                     </a:p>
                   </a:txBody>
-                  <a:tcPr marL="91440" marR="91440" marT="45720" marB="45720" anchor="ctr">
+                  <a:tcPr anchor="ctr">
                     <a:lnL w="25400" cap="flat" cmpd="sng" algn="ctr">
                       <a:solidFill>
                         <a:srgbClr val="FFFFFF"/>
@@ -5648,7 +5603,7 @@
                     <a:bodyPr/>
                     <a:lstStyle/>
                     <a:p>
-                      <a:pPr algn="l" indent="0" marL="0">
+                      <a:pPr marL="0" indent="0" algn="l">
                         <a:buNone/>
                       </a:pPr>
                       <a:r>
@@ -5669,7 +5624,7 @@
                       </a:endParaRPr>
                     </a:p>
                   </a:txBody>
-                  <a:tcPr marL="91440" marR="91440" marT="45720" marB="45720" anchor="ctr">
+                  <a:tcPr anchor="ctr">
                     <a:lnL w="25400" cap="flat" cmpd="sng" algn="ctr">
                       <a:solidFill>
                         <a:srgbClr val="FFFFFF"/>
@@ -5711,6 +5666,11 @@
                     </a:solidFill>
                   </a:tcPr>
                 </a:tc>
+                <a:extLst>
+                  <a:ext uri="{0D108BD9-81ED-4DB2-BD59-A6C34878D82A}">
+                    <a16:rowId xmlns:a16="http://schemas.microsoft.com/office/drawing/2014/main" val="10002"/>
+                  </a:ext>
+                </a:extLst>
               </a:tr>
               <a:tr h="1005840">
                 <a:tc>
@@ -5718,7 +5678,7 @@
                     <a:bodyPr/>
                     <a:lstStyle/>
                     <a:p>
-                      <a:pPr algn="l" indent="0" marL="0">
+                      <a:pPr marL="0" indent="0" algn="l">
                         <a:buNone/>
                       </a:pPr>
                       <a:r>
@@ -5739,7 +5699,7 @@
                       </a:endParaRPr>
                     </a:p>
                   </a:txBody>
-                  <a:tcPr marL="91440" marR="91440" marT="45720" marB="45720" anchor="ctr">
+                  <a:tcPr anchor="ctr">
                     <a:lnL w="25400" cap="flat" cmpd="sng" algn="ctr">
                       <a:solidFill>
                         <a:srgbClr val="FFFFFF"/>
@@ -5786,7 +5746,7 @@
                     <a:bodyPr/>
                     <a:lstStyle/>
                     <a:p>
-                      <a:pPr algn="l" indent="0" marL="0">
+                      <a:pPr marL="0" indent="0" algn="l">
                         <a:buNone/>
                       </a:pPr>
                       <a:r>
@@ -5807,7 +5767,7 @@
                       </a:endParaRPr>
                     </a:p>
                   </a:txBody>
-                  <a:tcPr marL="91440" marR="91440" marT="45720" marB="45720" anchor="ctr">
+                  <a:tcPr anchor="ctr">
                     <a:lnL w="25400" cap="flat" cmpd="sng" algn="ctr">
                       <a:solidFill>
                         <a:srgbClr val="FFFFFF"/>
@@ -5849,6 +5809,11 @@
                     </a:solidFill>
                   </a:tcPr>
                 </a:tc>
+                <a:extLst>
+                  <a:ext uri="{0D108BD9-81ED-4DB2-BD59-A6C34878D82A}">
+                    <a16:rowId xmlns:a16="http://schemas.microsoft.com/office/drawing/2014/main" val="10003"/>
+                  </a:ext>
+                </a:extLst>
               </a:tr>
             </a:tbl>
           </a:graphicData>
@@ -5875,7 +5840,7 @@
           <a:bodyPr wrap="square" lIns="0" tIns="0" rIns="0" bIns="0" rtlCol="0" anchor="ctr"/>
           <a:lstStyle/>
           <a:p>
-            <a:pPr algn="ctr" indent="0" marL="0">
+            <a:pPr marL="0" indent="0" algn="ctr">
               <a:buNone/>
             </a:pPr>
             <a:r>
@@ -5909,6 +5874,7 @@
         <a:solidFill>
           <a:srgbClr val="FFFFFF"/>
         </a:solidFill>
+        <a:effectLst/>
       </p:bgPr>
     </p:bg>
     <p:spTree>
@@ -5949,6 +5915,13 @@
             <a:prstDash val="solid"/>
           </a:ln>
         </p:spPr>
+        <p:txBody>
+          <a:bodyPr/>
+          <a:lstStyle/>
+          <a:p>
+            <a:endParaRPr lang="en-US"/>
+          </a:p>
+        </p:txBody>
       </p:sp>
       <p:sp>
         <p:nvSpPr>
@@ -5974,6 +5947,13 @@
             <a:prstDash val="solid"/>
           </a:ln>
         </p:spPr>
+        <p:txBody>
+          <a:bodyPr/>
+          <a:lstStyle/>
+          <a:p>
+            <a:endParaRPr lang="en-US"/>
+          </a:p>
+        </p:txBody>
       </p:sp>
       <p:sp>
         <p:nvSpPr>
@@ -5996,7 +5976,7 @@
           <a:bodyPr wrap="square" lIns="0" tIns="0" rIns="0" bIns="0" rtlCol="0" anchor="ctr"/>
           <a:lstStyle/>
           <a:p>
-            <a:pPr indent="0" marL="0">
+            <a:pPr marL="0" indent="0">
               <a:buNone/>
             </a:pPr>
             <a:r>
@@ -6035,7 +6015,7 @@
           <a:bodyPr wrap="square" lIns="0" tIns="0" rIns="0" bIns="0" rtlCol="0" anchor="ctr"/>
           <a:lstStyle/>
           <a:p>
-            <a:pPr algn="r" indent="0" marL="0">
+            <a:pPr marL="0" indent="0" algn="r">
               <a:buNone/>
             </a:pPr>
             <a:r>
@@ -6074,7 +6054,7 @@
           <a:bodyPr wrap="square" lIns="0" tIns="0" rIns="0" bIns="0" rtlCol="0" anchor="ctr"/>
           <a:lstStyle/>
           <a:p>
-            <a:pPr indent="0" marL="0">
+            <a:pPr marL="0" indent="0">
               <a:buNone/>
             </a:pPr>
             <a:r>
@@ -6113,7 +6093,7 @@
           <a:bodyPr wrap="square" lIns="50800" tIns="50800" rIns="50800" bIns="50800" rtlCol="0" anchor="t"/>
           <a:lstStyle/>
           <a:p>
-            <a:pPr indent="0" marL="0">
+            <a:pPr marL="0" indent="0">
               <a:buNone/>
             </a:pPr>
             <a:r>
@@ -6130,13 +6110,13 @@
             <a:endParaRPr lang="en-US" sz="1800" dirty="0"/>
           </a:p>
           <a:p>
-            <a:pPr indent="0" marL="0">
+            <a:pPr marL="0" indent="0">
               <a:buNone/>
             </a:pPr>
             <a:endParaRPr lang="en-US" sz="1800" dirty="0"/>
           </a:p>
           <a:p>
-            <a:pPr indent="0" marL="0">
+            <a:pPr marL="0" indent="0">
               <a:buNone/>
             </a:pPr>
             <a:r>
@@ -6153,13 +6133,13 @@
             <a:endParaRPr lang="en-US" sz="1800" dirty="0"/>
           </a:p>
           <a:p>
-            <a:pPr indent="0" marL="0">
+            <a:pPr marL="0" indent="0">
               <a:buNone/>
             </a:pPr>
             <a:endParaRPr lang="en-US" sz="1800" dirty="0"/>
           </a:p>
           <a:p>
-            <a:pPr indent="0" marL="0">
+            <a:pPr marL="0" indent="0">
               <a:buNone/>
             </a:pPr>
             <a:r>
@@ -6176,13 +6156,13 @@
             <a:endParaRPr lang="en-US" sz="1800" dirty="0"/>
           </a:p>
           <a:p>
-            <a:pPr indent="0" marL="0">
+            <a:pPr marL="0" indent="0">
               <a:buNone/>
             </a:pPr>
             <a:endParaRPr lang="en-US" sz="1800" dirty="0"/>
           </a:p>
           <a:p>
-            <a:pPr indent="0" marL="0">
+            <a:pPr marL="0" indent="0">
               <a:buNone/>
             </a:pPr>
             <a:r>
@@ -6221,7 +6201,7 @@
           <a:bodyPr wrap="square" lIns="0" tIns="0" rIns="0" bIns="0" rtlCol="0" anchor="ctr"/>
           <a:lstStyle/>
           <a:p>
-            <a:pPr algn="ctr" indent="0" marL="0">
+            <a:pPr marL="0" indent="0" algn="ctr">
               <a:buNone/>
             </a:pPr>
             <a:r>
@@ -6255,6 +6235,7 @@
         <a:solidFill>
           <a:srgbClr val="FFFFFF"/>
         </a:solidFill>
+        <a:effectLst/>
       </p:bgPr>
     </p:bg>
     <p:spTree>
@@ -6295,6 +6276,13 @@
             <a:prstDash val="solid"/>
           </a:ln>
         </p:spPr>
+        <p:txBody>
+          <a:bodyPr/>
+          <a:lstStyle/>
+          <a:p>
+            <a:endParaRPr lang="en-US"/>
+          </a:p>
+        </p:txBody>
       </p:sp>
       <p:sp>
         <p:nvSpPr>
@@ -6320,6 +6308,13 @@
             <a:prstDash val="solid"/>
           </a:ln>
         </p:spPr>
+        <p:txBody>
+          <a:bodyPr/>
+          <a:lstStyle/>
+          <a:p>
+            <a:endParaRPr lang="en-US"/>
+          </a:p>
+        </p:txBody>
       </p:sp>
       <p:sp>
         <p:nvSpPr>
@@ -6342,7 +6337,7 @@
           <a:bodyPr wrap="square" lIns="0" tIns="0" rIns="0" bIns="0" rtlCol="0" anchor="ctr"/>
           <a:lstStyle/>
           <a:p>
-            <a:pPr indent="0" marL="0">
+            <a:pPr marL="0" indent="0">
               <a:buNone/>
             </a:pPr>
             <a:r>
@@ -6381,7 +6376,7 @@
           <a:bodyPr wrap="square" lIns="0" tIns="0" rIns="0" bIns="0" rtlCol="0" anchor="ctr"/>
           <a:lstStyle/>
           <a:p>
-            <a:pPr algn="r" indent="0" marL="0">
+            <a:pPr marL="0" indent="0" algn="r">
               <a:buNone/>
             </a:pPr>
             <a:r>
@@ -6420,7 +6415,7 @@
           <a:bodyPr wrap="square" lIns="0" tIns="0" rIns="0" bIns="0" rtlCol="0" anchor="ctr"/>
           <a:lstStyle/>
           <a:p>
-            <a:pPr indent="0" marL="0">
+            <a:pPr marL="0" indent="0">
               <a:buNone/>
             </a:pPr>
             <a:r>
@@ -6459,7 +6454,7 @@
           <a:bodyPr wrap="square" lIns="50800" tIns="50800" rIns="50800" bIns="50800" rtlCol="0" anchor="t"/>
           <a:lstStyle/>
           <a:p>
-            <a:pPr indent="0" marL="0">
+            <a:pPr marL="0" indent="0">
               <a:buNone/>
             </a:pPr>
             <a:r>
@@ -6476,13 +6471,13 @@
             <a:endParaRPr lang="en-US" sz="1800" dirty="0"/>
           </a:p>
           <a:p>
-            <a:pPr indent="0" marL="0">
+            <a:pPr marL="0" indent="0">
               <a:buNone/>
             </a:pPr>
             <a:endParaRPr lang="en-US" sz="1800" dirty="0"/>
           </a:p>
           <a:p>
-            <a:pPr indent="0" marL="0">
+            <a:pPr marL="0" indent="0">
               <a:buNone/>
             </a:pPr>
             <a:r>
@@ -6499,13 +6494,13 @@
             <a:endParaRPr lang="en-US" sz="1800" dirty="0"/>
           </a:p>
           <a:p>
-            <a:pPr indent="0" marL="0">
+            <a:pPr marL="0" indent="0">
               <a:buNone/>
             </a:pPr>
             <a:endParaRPr lang="en-US" sz="1800" dirty="0"/>
           </a:p>
           <a:p>
-            <a:pPr indent="0" marL="0">
+            <a:pPr marL="0" indent="0">
               <a:buNone/>
             </a:pPr>
             <a:r>
@@ -6522,13 +6517,13 @@
             <a:endParaRPr lang="en-US" sz="1800" dirty="0"/>
           </a:p>
           <a:p>
-            <a:pPr indent="0" marL="0">
+            <a:pPr marL="0" indent="0">
               <a:buNone/>
             </a:pPr>
             <a:endParaRPr lang="en-US" sz="1800" dirty="0"/>
           </a:p>
           <a:p>
-            <a:pPr indent="0" marL="0">
+            <a:pPr marL="0" indent="0">
               <a:buNone/>
             </a:pPr>
             <a:r>
@@ -6567,7 +6562,7 @@
           <a:bodyPr wrap="square" lIns="0" tIns="0" rIns="0" bIns="0" rtlCol="0" anchor="ctr"/>
           <a:lstStyle/>
           <a:p>
-            <a:pPr algn="ctr" indent="0" marL="0">
+            <a:pPr marL="0" indent="0" algn="ctr">
               <a:buNone/>
             </a:pPr>
             <a:r>
@@ -6601,6 +6596,7 @@
         <a:solidFill>
           <a:srgbClr val="FFFFFF"/>
         </a:solidFill>
+        <a:effectLst/>
       </p:bgPr>
     </p:bg>
     <p:spTree>
@@ -6641,6 +6637,13 @@
             <a:prstDash val="solid"/>
           </a:ln>
         </p:spPr>
+        <p:txBody>
+          <a:bodyPr/>
+          <a:lstStyle/>
+          <a:p>
+            <a:endParaRPr lang="en-US"/>
+          </a:p>
+        </p:txBody>
       </p:sp>
       <p:sp>
         <p:nvSpPr>
@@ -6666,6 +6669,13 @@
             <a:prstDash val="solid"/>
           </a:ln>
         </p:spPr>
+        <p:txBody>
+          <a:bodyPr/>
+          <a:lstStyle/>
+          <a:p>
+            <a:endParaRPr lang="en-US"/>
+          </a:p>
+        </p:txBody>
       </p:sp>
       <p:sp>
         <p:nvSpPr>
@@ -6688,7 +6698,7 @@
           <a:bodyPr wrap="square" lIns="0" tIns="0" rIns="0" bIns="0" rtlCol="0" anchor="ctr"/>
           <a:lstStyle/>
           <a:p>
-            <a:pPr indent="0" marL="0">
+            <a:pPr marL="0" indent="0">
               <a:buNone/>
             </a:pPr>
             <a:r>
@@ -6727,7 +6737,7 @@
           <a:bodyPr wrap="square" lIns="0" tIns="0" rIns="0" bIns="0" rtlCol="0" anchor="ctr"/>
           <a:lstStyle/>
           <a:p>
-            <a:pPr algn="r" indent="0" marL="0">
+            <a:pPr marL="0" indent="0" algn="r">
               <a:buNone/>
             </a:pPr>
             <a:r>
@@ -6766,7 +6776,7 @@
           <a:bodyPr wrap="square" lIns="0" tIns="0" rIns="0" bIns="0" rtlCol="0" anchor="ctr"/>
           <a:lstStyle/>
           <a:p>
-            <a:pPr indent="0" marL="0">
+            <a:pPr marL="0" indent="0">
               <a:buNone/>
             </a:pPr>
             <a:r>
@@ -6805,7 +6815,7 @@
           <a:bodyPr wrap="square" lIns="50800" tIns="50800" rIns="50800" bIns="50800" rtlCol="0" anchor="t"/>
           <a:lstStyle/>
           <a:p>
-            <a:pPr indent="0" marL="0">
+            <a:pPr marL="0" indent="0">
               <a:buNone/>
             </a:pPr>
             <a:r>
@@ -6822,13 +6832,13 @@
             <a:endParaRPr lang="en-US" sz="1800" dirty="0"/>
           </a:p>
           <a:p>
-            <a:pPr indent="0" marL="0">
+            <a:pPr marL="0" indent="0">
               <a:buNone/>
             </a:pPr>
             <a:endParaRPr lang="en-US" sz="1800" dirty="0"/>
           </a:p>
           <a:p>
-            <a:pPr indent="0" marL="0">
+            <a:pPr marL="0" indent="0">
               <a:buNone/>
             </a:pPr>
             <a:r>
@@ -6845,13 +6855,13 @@
             <a:endParaRPr lang="en-US" sz="1800" dirty="0"/>
           </a:p>
           <a:p>
-            <a:pPr indent="0" marL="0">
+            <a:pPr marL="0" indent="0">
               <a:buNone/>
             </a:pPr>
             <a:endParaRPr lang="en-US" sz="1800" dirty="0"/>
           </a:p>
           <a:p>
-            <a:pPr indent="0" marL="0">
+            <a:pPr marL="0" indent="0">
               <a:buNone/>
             </a:pPr>
             <a:r>
@@ -6868,13 +6878,13 @@
             <a:endParaRPr lang="en-US" sz="1800" dirty="0"/>
           </a:p>
           <a:p>
-            <a:pPr indent="0" marL="0">
+            <a:pPr marL="0" indent="0">
               <a:buNone/>
             </a:pPr>
             <a:endParaRPr lang="en-US" sz="1800" dirty="0"/>
           </a:p>
           <a:p>
-            <a:pPr indent="0" marL="0">
+            <a:pPr marL="0" indent="0">
               <a:buNone/>
             </a:pPr>
             <a:r>
@@ -6913,7 +6923,7 @@
           <a:bodyPr wrap="square" lIns="0" tIns="0" rIns="0" bIns="0" rtlCol="0" anchor="ctr"/>
           <a:lstStyle/>
           <a:p>
-            <a:pPr algn="ctr" indent="0" marL="0">
+            <a:pPr marL="0" indent="0" algn="ctr">
               <a:buNone/>
             </a:pPr>
             <a:r>
@@ -7232,4 +7242,319 @@
     </a:ext>
   </a:extLst>
 </a:theme>
+</file>
+
+<file path=ppt/theme/theme2.xml><?xml version="1.0" encoding="utf-8"?>
+<a:theme xmlns:a="http://schemas.openxmlformats.org/drawingml/2006/main" name="Office Theme">
+  <a:themeElements>
+    <a:clrScheme name="Office">
+      <a:dk1>
+        <a:sysClr val="windowText" lastClr="000000"/>
+      </a:dk1>
+      <a:lt1>
+        <a:sysClr val="window" lastClr="FFFFFF"/>
+      </a:lt1>
+      <a:dk2>
+        <a:srgbClr val="0E2841"/>
+      </a:dk2>
+      <a:lt2>
+        <a:srgbClr val="E8E8E8"/>
+      </a:lt2>
+      <a:accent1>
+        <a:srgbClr val="156082"/>
+      </a:accent1>
+      <a:accent2>
+        <a:srgbClr val="E97132"/>
+      </a:accent2>
+      <a:accent3>
+        <a:srgbClr val="196B24"/>
+      </a:accent3>
+      <a:accent4>
+        <a:srgbClr val="0F9ED5"/>
+      </a:accent4>
+      <a:accent5>
+        <a:srgbClr val="A02B93"/>
+      </a:accent5>
+      <a:accent6>
+        <a:srgbClr val="4EA72E"/>
+      </a:accent6>
+      <a:hlink>
+        <a:srgbClr val="467886"/>
+      </a:hlink>
+      <a:folHlink>
+        <a:srgbClr val="96607D"/>
+      </a:folHlink>
+    </a:clrScheme>
+    <a:fontScheme name="Office">
+      <a:majorFont>
+        <a:latin typeface="Aptos Display" panose="02110004020202020204"/>
+        <a:ea typeface=""/>
+        <a:cs typeface=""/>
+        <a:font script="Jpan" typeface="游ゴシック Light"/>
+        <a:font script="Hang" typeface="맑은 고딕"/>
+        <a:font script="Hans" typeface="等线 Light"/>
+        <a:font script="Hant" typeface="新細明體"/>
+        <a:font script="Arab" typeface="Times New Roman"/>
+        <a:font script="Hebr" typeface="Times New Roman"/>
+        <a:font script="Thai" typeface="Angsana New"/>
+        <a:font script="Ethi" typeface="Nyala"/>
+        <a:font script="Beng" typeface="Vrinda"/>
+        <a:font script="Gujr" typeface="Shruti"/>
+        <a:font script="Khmr" typeface="MoolBoran"/>
+        <a:font script="Knda" typeface="Tunga"/>
+        <a:font script="Guru" typeface="Raavi"/>
+        <a:font script="Cans" typeface="Euphemia"/>
+        <a:font script="Cher" typeface="Plantagenet Cherokee"/>
+        <a:font script="Yiii" typeface="Microsoft Yi Baiti"/>
+        <a:font script="Tibt" typeface="Microsoft Himalaya"/>
+        <a:font script="Thaa" typeface="MV Boli"/>
+        <a:font script="Deva" typeface="Mangal"/>
+        <a:font script="Telu" typeface="Gautami"/>
+        <a:font script="Taml" typeface="Latha"/>
+        <a:font script="Syrc" typeface="Estrangelo Edessa"/>
+        <a:font script="Orya" typeface="Kalinga"/>
+        <a:font script="Mlym" typeface="Kartika"/>
+        <a:font script="Laoo" typeface="DokChampa"/>
+        <a:font script="Sinh" typeface="Iskoola Pota"/>
+        <a:font script="Mong" typeface="Mongolian Baiti"/>
+        <a:font script="Viet" typeface="Times New Roman"/>
+        <a:font script="Uigh" typeface="Microsoft Uighur"/>
+        <a:font script="Geor" typeface="Sylfaen"/>
+        <a:font script="Armn" typeface="Arial"/>
+        <a:font script="Bugi" typeface="Leelawadee UI"/>
+        <a:font script="Bopo" typeface="Microsoft JhengHei"/>
+        <a:font script="Java" typeface="Javanese Text"/>
+        <a:font script="Lisu" typeface="Segoe UI"/>
+        <a:font script="Mymr" typeface="Myanmar Text"/>
+        <a:font script="Nkoo" typeface="Ebrima"/>
+        <a:font script="Olck" typeface="Nirmala UI"/>
+        <a:font script="Osma" typeface="Ebrima"/>
+        <a:font script="Phag" typeface="Phagspa"/>
+        <a:font script="Syrn" typeface="Estrangelo Edessa"/>
+        <a:font script="Syrj" typeface="Estrangelo Edessa"/>
+        <a:font script="Syre" typeface="Estrangelo Edessa"/>
+        <a:font script="Sora" typeface="Nirmala UI"/>
+        <a:font script="Tale" typeface="Microsoft Tai Le"/>
+        <a:font script="Talu" typeface="Microsoft New Tai Lue"/>
+        <a:font script="Tfng" typeface="Ebrima"/>
+      </a:majorFont>
+      <a:minorFont>
+        <a:latin typeface="Aptos" panose="02110004020202020204"/>
+        <a:ea typeface=""/>
+        <a:cs typeface=""/>
+        <a:font script="Jpan" typeface="游ゴシック"/>
+        <a:font script="Hang" typeface="맑은 고딕"/>
+        <a:font script="Hans" typeface="等线"/>
+        <a:font script="Hant" typeface="新細明體"/>
+        <a:font script="Arab" typeface="Arial"/>
+        <a:font script="Hebr" typeface="Arial"/>
+        <a:font script="Thai" typeface="Cordia New"/>
+        <a:font script="Ethi" typeface="Nyala"/>
+        <a:font script="Beng" typeface="Vrinda"/>
+        <a:font script="Gujr" typeface="Shruti"/>
+        <a:font script="Khmr" typeface="DaunPenh"/>
+        <a:font script="Knda" typeface="Tunga"/>
+        <a:font script="Guru" typeface="Raavi"/>
+        <a:font script="Cans" typeface="Euphemia"/>
+        <a:font script="Cher" typeface="Plantagenet Cherokee"/>
+        <a:font script="Yiii" typeface="Microsoft Yi Baiti"/>
+        <a:font script="Tibt" typeface="Microsoft Himalaya"/>
+        <a:font script="Thaa" typeface="MV Boli"/>
+        <a:font script="Deva" typeface="Mangal"/>
+        <a:font script="Telu" typeface="Gautami"/>
+        <a:font script="Taml" typeface="Latha"/>
+        <a:font script="Syrc" typeface="Estrangelo Edessa"/>
+        <a:font script="Orya" typeface="Kalinga"/>
+        <a:font script="Mlym" typeface="Kartika"/>
+        <a:font script="Laoo" typeface="DokChampa"/>
+        <a:font script="Sinh" typeface="Iskoola Pota"/>
+        <a:font script="Mong" typeface="Mongolian Baiti"/>
+        <a:font script="Viet" typeface="Arial"/>
+        <a:font script="Uigh" typeface="Microsoft Uighur"/>
+        <a:font script="Geor" typeface="Sylfaen"/>
+        <a:font script="Armn" typeface="Arial"/>
+        <a:font script="Bugi" typeface="Leelawadee UI"/>
+        <a:font script="Bopo" typeface="Microsoft JhengHei"/>
+        <a:font script="Java" typeface="Javanese Text"/>
+        <a:font script="Lisu" typeface="Segoe UI"/>
+        <a:font script="Mymr" typeface="Myanmar Text"/>
+        <a:font script="Nkoo" typeface="Ebrima"/>
+        <a:font script="Olck" typeface="Nirmala UI"/>
+        <a:font script="Osma" typeface="Ebrima"/>
+        <a:font script="Phag" typeface="Phagspa"/>
+        <a:font script="Syrn" typeface="Estrangelo Edessa"/>
+        <a:font script="Syrj" typeface="Estrangelo Edessa"/>
+        <a:font script="Syre" typeface="Estrangelo Edessa"/>
+        <a:font script="Sora" typeface="Nirmala UI"/>
+        <a:font script="Tale" typeface="Microsoft Tai Le"/>
+        <a:font script="Talu" typeface="Microsoft New Tai Lue"/>
+        <a:font script="Tfng" typeface="Ebrima"/>
+      </a:minorFont>
+    </a:fontScheme>
+    <a:fmtScheme name="Office">
+      <a:fillStyleLst>
+        <a:solidFill>
+          <a:schemeClr val="phClr"/>
+        </a:solidFill>
+        <a:gradFill rotWithShape="1">
+          <a:gsLst>
+            <a:gs pos="0">
+              <a:schemeClr val="phClr">
+                <a:lumMod val="110000"/>
+                <a:satMod val="105000"/>
+                <a:tint val="67000"/>
+              </a:schemeClr>
+            </a:gs>
+            <a:gs pos="50000">
+              <a:schemeClr val="phClr">
+                <a:lumMod val="105000"/>
+                <a:satMod val="103000"/>
+                <a:tint val="73000"/>
+              </a:schemeClr>
+            </a:gs>
+            <a:gs pos="100000">
+              <a:schemeClr val="phClr">
+                <a:lumMod val="105000"/>
+                <a:satMod val="109000"/>
+                <a:tint val="81000"/>
+              </a:schemeClr>
+            </a:gs>
+          </a:gsLst>
+          <a:lin ang="5400000" scaled="0"/>
+        </a:gradFill>
+        <a:gradFill rotWithShape="1">
+          <a:gsLst>
+            <a:gs pos="0">
+              <a:schemeClr val="phClr">
+                <a:satMod val="103000"/>
+                <a:lumMod val="102000"/>
+                <a:tint val="94000"/>
+              </a:schemeClr>
+            </a:gs>
+            <a:gs pos="50000">
+              <a:schemeClr val="phClr">
+                <a:satMod val="110000"/>
+                <a:lumMod val="100000"/>
+                <a:shade val="100000"/>
+              </a:schemeClr>
+            </a:gs>
+            <a:gs pos="100000">
+              <a:schemeClr val="phClr">
+                <a:lumMod val="99000"/>
+                <a:satMod val="120000"/>
+                <a:shade val="78000"/>
+              </a:schemeClr>
+            </a:gs>
+          </a:gsLst>
+          <a:lin ang="5400000" scaled="0"/>
+        </a:gradFill>
+      </a:fillStyleLst>
+      <a:lnStyleLst>
+        <a:ln w="12700" cap="flat" cmpd="sng" algn="ctr">
+          <a:solidFill>
+            <a:schemeClr val="phClr"/>
+          </a:solidFill>
+          <a:prstDash val="solid"/>
+          <a:miter lim="800000"/>
+        </a:ln>
+        <a:ln w="19050" cap="flat" cmpd="sng" algn="ctr">
+          <a:solidFill>
+            <a:schemeClr val="phClr"/>
+          </a:solidFill>
+          <a:prstDash val="solid"/>
+          <a:miter lim="800000"/>
+        </a:ln>
+        <a:ln w="25400" cap="flat" cmpd="sng" algn="ctr">
+          <a:solidFill>
+            <a:schemeClr val="phClr"/>
+          </a:solidFill>
+          <a:prstDash val="solid"/>
+          <a:miter lim="800000"/>
+        </a:ln>
+      </a:lnStyleLst>
+      <a:effectStyleLst>
+        <a:effectStyle>
+          <a:effectLst/>
+        </a:effectStyle>
+        <a:effectStyle>
+          <a:effectLst/>
+        </a:effectStyle>
+        <a:effectStyle>
+          <a:effectLst>
+            <a:outerShdw blurRad="57150" dist="19050" dir="5400000" algn="ctr" rotWithShape="0">
+              <a:srgbClr val="000000">
+                <a:alpha val="63000"/>
+              </a:srgbClr>
+            </a:outerShdw>
+          </a:effectLst>
+        </a:effectStyle>
+      </a:effectStyleLst>
+      <a:bgFillStyleLst>
+        <a:solidFill>
+          <a:schemeClr val="phClr"/>
+        </a:solidFill>
+        <a:solidFill>
+          <a:schemeClr val="phClr">
+            <a:tint val="95000"/>
+            <a:satMod val="170000"/>
+          </a:schemeClr>
+        </a:solidFill>
+        <a:gradFill rotWithShape="1">
+          <a:gsLst>
+            <a:gs pos="0">
+              <a:schemeClr val="phClr">
+                <a:tint val="93000"/>
+                <a:satMod val="150000"/>
+                <a:shade val="98000"/>
+                <a:lumMod val="102000"/>
+              </a:schemeClr>
+            </a:gs>
+            <a:gs pos="50000">
+              <a:schemeClr val="phClr">
+                <a:tint val="98000"/>
+                <a:satMod val="130000"/>
+                <a:shade val="90000"/>
+                <a:lumMod val="103000"/>
+              </a:schemeClr>
+            </a:gs>
+            <a:gs pos="100000">
+              <a:schemeClr val="phClr">
+                <a:shade val="63000"/>
+                <a:satMod val="120000"/>
+              </a:schemeClr>
+            </a:gs>
+          </a:gsLst>
+          <a:lin ang="5400000" scaled="0"/>
+        </a:gradFill>
+      </a:bgFillStyleLst>
+    </a:fmtScheme>
+  </a:themeElements>
+  <a:objectDefaults>
+    <a:lnDef>
+      <a:spPr/>
+      <a:bodyPr/>
+      <a:lstStyle/>
+      <a:style>
+        <a:lnRef idx="2">
+          <a:schemeClr val="accent1"/>
+        </a:lnRef>
+        <a:fillRef idx="0">
+          <a:schemeClr val="accent1"/>
+        </a:fillRef>
+        <a:effectRef idx="1">
+          <a:schemeClr val="accent1"/>
+        </a:effectRef>
+        <a:fontRef idx="minor">
+          <a:schemeClr val="tx1"/>
+        </a:fontRef>
+      </a:style>
+    </a:lnDef>
+  </a:objectDefaults>
+  <a:extraClrSchemeLst/>
+  <a:extLst>
+    <a:ext uri="{05A4C25C-085E-4340-85A3-A5531E510DB2}">
+      <thm15:themeFamily xmlns:thm15="http://schemas.microsoft.com/office/thememl/2012/main" name="Office Theme" id="{2E142A2C-CD16-42D6-873A-C26D2A0506FA}" vid="{1BDDFF52-6CD6-40A5-AB3C-68EB2F1E4D0A}"/>
+    </a:ext>
+  </a:extLst>
+</a:theme>
 </file>